--- a/slides/Slides.pptx
+++ b/slides/Slides.pptx
@@ -9884,7 +9884,7 @@
               </a:defRPr>
             </a:pPr>
             <a:r>
-              <a:t>React to incoming messages from other agents or injected events. The E suffix is stripped when matching. (From original DALI slides: "Events and Actions")</a:t>
+              <a:t>React to incoming messages from other agents or injected events. The E suffix is stripped when matching.</a:t>
             </a:r>
           </a:p>
         </p:txBody>
@@ -10038,7 +10038,7 @@
               </a:defRPr>
             </a:pPr>
             <a:r>
-              <a:t>%% React to a bell ring event (DALI slide p.7)</a:t>
+              <a:t>%% React to a bell ring event</a:t>
             </a:r>
           </a:p>
           <a:p>
@@ -10112,7 +10112,7 @@
               </a:defRPr>
             </a:pPr>
             <a:r>
-              <a:t>%% Access controller (DALI slide p.9)</a:t>
+              <a:t>%% Access controller</a:t>
             </a:r>
           </a:p>
           <a:p>
@@ -10202,7 +10202,7 @@
               </a:defRPr>
             </a:pPr>
             <a:r>
-              <a:t>%% React to alarm with pattern matching (DALI slide p.8)</a:t>
+              <a:t>%% React to alarm with pattern matching</a:t>
             </a:r>
           </a:p>
           <a:p>
@@ -10498,7 +10498,7 @@
               </a:defRPr>
             </a:pPr>
             <a:r>
-              <a:t>Two equivalent ways to send messages — DALI2 style (send) and classic DALI style (messageA). (DALI slides p.7, p.28)</a:t>
+              <a:t>Two equivalent ways to send messages — DALI2 style (send) and classic DALI style (messageA).</a:t>
             </a:r>
           </a:p>
         </p:txBody>
@@ -10652,7 +10652,7 @@
               </a:defRPr>
             </a:pPr>
             <a:r>
-              <a:t>%% Classic DALI style (from DALI basic example)</a:t>
+              <a:t>%% Classic DALI style</a:t>
             </a:r>
           </a:p>
           <a:p>
@@ -11099,7 +11099,7 @@
               </a:defRPr>
             </a:pPr>
             <a:r>
-              <a:t>Named, reusable actions. Actions are recorded in past memory as did(Action). (DALI slides p.7, p.9)</a:t>
+              <a:t>Named, reusable actions. Actions are recorded in past memory as did(Action).</a:t>
             </a:r>
           </a:p>
         </p:txBody>
@@ -11253,7 +11253,7 @@
               </a:defRPr>
             </a:pPr>
             <a:r>
-              <a:t>%% Action definitions (DALI slide p.7)</a:t>
+              <a:t>%% Action definitions</a:t>
             </a:r>
           </a:p>
           <a:p>
@@ -11314,7 +11314,7 @@
               </a:defRPr>
             </a:pPr>
             <a:r>
-              <a:t>%% Actions with preconditions (DALI slide p.7)</a:t>
+              <a:t>%% Actions with preconditions</a:t>
             </a:r>
           </a:p>
           <a:p>
@@ -12500,7 +12500,7 @@
               </a:defRPr>
             </a:pPr>
             <a:r>
-              <a:t>Internal conclusions initiate further inference (proactivity!). Defined by handler + configuration. (DALI slides p.11–12)</a:t>
+              <a:t>Internal conclusions initiate further inference (proactivity!). Defined by handler + configuration.</a:t>
             </a:r>
           </a:p>
         </p:txBody>
@@ -12654,7 +12654,7 @@
               </a:defRPr>
             </a:pPr>
             <a:r>
-              <a:t>%% Internal event: cake is ready (DALI slide p.11)</a:t>
+              <a:t>%% Internal event: cake is ready</a:t>
             </a:r>
           </a:p>
           <a:p>
@@ -12808,7 +12808,7 @@
               </a:defRPr>
             </a:pPr>
             <a:r>
-              <a:t>%% Attack detection (DALI slide p.12)</a:t>
+              <a:t>%% Attack detection</a:t>
             </a:r>
           </a:p>
           <a:p>
@@ -16387,7 +16387,7 @@
               </a:defRPr>
             </a:pPr>
             <a:r>
-              <a:t>Edge-triggered: fires exactly once when condition transitions from false to true. (DALI slides p.7, p.9: actions with preconditions)</a:t>
+              <a:t>Edge-triggered: fires exactly once when condition transitions from false to true.</a:t>
             </a:r>
           </a:p>
         </p:txBody>
@@ -16541,7 +16541,7 @@
               </a:defRPr>
             </a:pPr>
             <a:r>
-              <a:t>%% Access controller (DALI slide p.9)</a:t>
+              <a:t>%% Access controller</a:t>
             </a:r>
           </a:p>
           <a:p>
@@ -16676,7 +16676,7 @@
               </a:defRPr>
             </a:pPr>
             <a:r>
-              <a:t>%% Actions with preconditions (DALI slide p.7)</a:t>
+              <a:t>%% Actions with preconditions</a:t>
             </a:r>
           </a:p>
           <a:p>
@@ -17447,7 +17447,7 @@
               </a:defRPr>
             </a:pPr>
             <a:r>
-              <a:t>Atomic environmental observations — the agent perceives them but does not define them. Three stages of an event in DALI (slides p.6–7): N (present) → E (reaction) → P (past memory).</a:t>
+              <a:t>Atomic environmental observations — the agent perceives them but does not define them. Three stages of an event: N (present) → E (reaction) → P (past memory).</a:t>
             </a:r>
           </a:p>
         </p:txBody>
@@ -17572,7 +17572,7 @@
               </a:defRPr>
             </a:pPr>
             <a:r>
-              <a:t>%% DALI slide p.6-7: "Perspectives on External Events"</a:t>
+              <a:t>%% Perspectives on External Events</a:t>
             </a:r>
           </a:p>
           <a:p>
@@ -17649,7 +17649,7 @@
               </a:defRPr>
             </a:pPr>
             <a:r>
-              <a:t>%% Original DALI example (slide p.7):</a:t>
+              <a:t>%% Example:</a:t>
             </a:r>
           </a:p>
           <a:p>
@@ -18064,7 +18064,7 @@
               </a:defRPr>
             </a:pPr>
             <a:r>
-              <a:t>Conjunction of events in the head of a reactive rule. Must occur within a simultaneity interval (delta-t). (DALI slides p.8, Double Events example)</a:t>
+              <a:t>Conjunction of events in the head of a reactive rule. Optional within(Seconds) enforces a simultaneity interval (delta-t).</a:t>
             </a:r>
           </a:p>
         </p:txBody>
@@ -18218,7 +18218,7 @@
               </a:defRPr>
             </a:pPr>
             <a:r>
-              <a:t>%% DALI slide p.8: conjunction of alarms</a:t>
+              <a:t>%% Conjunction of alarms</a:t>
             </a:r>
           </a:p>
           <a:p>
@@ -18324,7 +18324,7 @@
               </a:defRPr>
             </a:pPr>
             <a:r>
-              <a:t>%% DALI Double Events example: fire detection</a:t>
+              <a:t>%% Fire detection (multiple events)</a:t>
             </a:r>
           </a:p>
           <a:p>
@@ -18401,7 +18401,7 @@
               </a:defRPr>
             </a:pPr>
             <a:r>
-              <a:t>%% within(N) = DALI's t60. / deltat(N) directive</a:t>
+              <a:t>%% within(N) enforces a time window for all events.</a:t>
             </a:r>
           </a:p>
           <a:p>
@@ -18665,7 +18665,7 @@
               </a:defRPr>
             </a:pPr>
             <a:r>
-              <a:t>Invariant conditions checked every cycle. If violated (condition is false), the handler fires. Syntax: Cond :~ Handler.</a:t>
+              <a:t>Invariant conditions checked every cycle. Prefix syntax: :~ Condition. If Condition fails, constraint is violated (logged by runtime).</a:t>
             </a:r>
           </a:p>
         </p:txBody>
@@ -18679,7 +18679,7 @@
         <p:spPr>
           <a:xfrm>
             <a:off x="548640" y="1965960"/>
-            <a:ext cx="10972800" cy="3529584"/>
+            <a:ext cx="10972800" cy="3310128"/>
           </a:xfrm>
           <a:prstGeom prst="rect">
             <a:avLst/>
@@ -18722,7 +18722,7 @@
         <p:spPr>
           <a:xfrm>
             <a:off x="548640" y="1965960"/>
-            <a:ext cx="45720" cy="3529584"/>
+            <a:ext cx="45720" cy="3310128"/>
           </a:xfrm>
           <a:prstGeom prst="rect">
             <a:avLst/>
@@ -18765,7 +18765,7 @@
         <p:spPr>
           <a:xfrm>
             <a:off x="777240" y="2103120"/>
-            <a:ext cx="10561320" cy="3255264"/>
+            <a:ext cx="10561320" cy="3035808"/>
           </a:xfrm>
           <a:prstGeom prst="rect">
             <a:avLst/>
@@ -18835,7 +18835,7 @@
               </a:defRPr>
             </a:pPr>
             <a:r>
-              <a:t>%% Left = condition that SHOULD hold; Right = handler if violated</a:t>
+              <a:t>%% :~ Condition. — fires when Condition is FALSE (violated)</a:t>
             </a:r>
           </a:p>
           <a:p>
@@ -18851,7 +18851,7 @@
               </a:defRPr>
             </a:pPr>
             <a:r>
-              <a:t>(believes(current_temp(T)), T &lt; 50) :~ (</a:t>
+              <a:t>:~ (believes(current_temp(T)), T &lt; 50).</a:t>
             </a:r>
           </a:p>
           <a:p>
@@ -18866,9 +18866,6 @@
                 <a:latin typeface="Consolas"/>
               </a:defRPr>
             </a:pPr>
-            <a:r>
-              <a:t>    log("CONSTRAINT VIOLATED: Temp ~w exceeds limit!", [T]),</a:t>
-            </a:r>
           </a:p>
           <a:p>
             <a:pPr>
@@ -18877,13 +18874,13 @@
               </a:spcAft>
               <a:defRPr sz="1400">
                 <a:solidFill>
-                  <a:srgbClr val="1E293B"/>
-                </a:solidFill>
-                <a:latin typeface="Consolas"/>
-              </a:defRPr>
-            </a:pPr>
-            <a:r>
-              <a:t>    send(coordinator, emergency(overheating, T))</a:t>
+                  <a:srgbClr val="7C3AED"/>
+                </a:solidFill>
+                <a:latin typeface="Consolas"/>
+              </a:defRPr>
+            </a:pPr>
+            <a:r>
+              <a:t>:- agent(server, [cycle(1)]).</a:t>
             </a:r>
           </a:p>
           <a:p>
@@ -18898,9 +18895,6 @@
                 <a:latin typeface="Consolas"/>
               </a:defRPr>
             </a:pPr>
-            <a:r>
-              <a:t>).</a:t>
-            </a:r>
           </a:p>
           <a:p>
             <a:pPr>
@@ -18909,11 +18903,14 @@
               </a:spcAft>
               <a:defRPr sz="1400">
                 <a:solidFill>
-                  <a:srgbClr val="1E293B"/>
-                </a:solidFill>
-                <a:latin typeface="Consolas"/>
-              </a:defRPr>
-            </a:pPr>
+                  <a:srgbClr val="64748B"/>
+                </a:solidFill>
+                <a:latin typeface="Consolas"/>
+              </a:defRPr>
+            </a:pPr>
+            <a:r>
+              <a:t>%% Invariant: agent must always have a valid config</a:t>
+            </a:r>
           </a:p>
           <a:p>
             <a:pPr>
@@ -18922,13 +18919,42 @@
               </a:spcAft>
               <a:defRPr sz="1400">
                 <a:solidFill>
+                  <a:srgbClr val="1E293B"/>
+                </a:solidFill>
+                <a:latin typeface="Consolas"/>
+              </a:defRPr>
+            </a:pPr>
+            <a:r>
+              <a:t>:~ believes(config_loaded).</a:t>
+            </a:r>
+          </a:p>
+          <a:p>
+            <a:pPr>
+              <a:spcAft>
+                <a:spcPts val="100"/>
+              </a:spcAft>
+              <a:defRPr sz="1400">
+                <a:solidFill>
+                  <a:srgbClr val="1E293B"/>
+                </a:solidFill>
+                <a:latin typeface="Consolas"/>
+              </a:defRPr>
+            </a:pPr>
+          </a:p>
+          <a:p>
+            <a:pPr>
+              <a:spcAft>
+                <a:spcPts val="100"/>
+              </a:spcAft>
+              <a:defRPr sz="1400">
+                <a:solidFill>
                   <a:srgbClr val="64748B"/>
                 </a:solidFill>
                 <a:latin typeface="Consolas"/>
               </a:defRPr>
             </a:pPr>
             <a:r>
-              <a:t>%% Simple constraint (log-only handler)</a:t>
+              <a:t>%% Checked automatically every agent cycle.</a:t>
             </a:r>
           </a:p>
           <a:p>
@@ -18938,58 +18964,13 @@
               </a:spcAft>
               <a:defRPr sz="1400">
                 <a:solidFill>
-                  <a:srgbClr val="1E293B"/>
-                </a:solidFill>
-                <a:latin typeface="Consolas"/>
-              </a:defRPr>
-            </a:pPr>
-            <a:r>
-              <a:t>believes(config_loaded) :~ log("Config not loaded!").</a:t>
-            </a:r>
-          </a:p>
-          <a:p>
-            <a:pPr>
-              <a:spcAft>
-                <a:spcPts val="100"/>
-              </a:spcAft>
-              <a:defRPr sz="1400">
-                <a:solidFill>
-                  <a:srgbClr val="1E293B"/>
-                </a:solidFill>
-                <a:latin typeface="Consolas"/>
-              </a:defRPr>
-            </a:pPr>
-          </a:p>
-          <a:p>
-            <a:pPr>
-              <a:spcAft>
-                <a:spcPts val="100"/>
-              </a:spcAft>
-              <a:defRPr sz="1400">
-                <a:solidFill>
                   <a:srgbClr val="64748B"/>
                 </a:solidFill>
                 <a:latin typeface="Consolas"/>
               </a:defRPr>
             </a:pPr>
             <a:r>
-              <a:t>%% Fires when condition is FALSE (violated).</a:t>
-            </a:r>
-          </a:p>
-          <a:p>
-            <a:pPr>
-              <a:spcAft>
-                <a:spcPts val="100"/>
-              </a:spcAft>
-              <a:defRPr sz="1400">
-                <a:solidFill>
-                  <a:srgbClr val="64748B"/>
-                </a:solidFill>
-                <a:latin typeface="Consolas"/>
-              </a:defRPr>
-            </a:pPr>
-            <a:r>
-              <a:t>%% Checked automatically every agent cycle.</a:t>
+              <a:t>%% If Condition is false, a warning is logged.</a:t>
             </a:r>
           </a:p>
         </p:txBody>
@@ -19449,7 +19430,7 @@
               </a:defRPr>
             </a:pPr>
             <a:r>
-              <a:t>Goals are automatically attempted until they succeed, then expire. (DALI slides p.14–15: "each goal pG will be automatically attempted until it succeeds")</a:t>
+              <a:t>Goals are automatically attempted until they succeed, then expire.</a:t>
             </a:r>
           </a:p>
         </p:txBody>
@@ -19603,7 +19584,7 @@
               </a:defRPr>
             </a:pPr>
             <a:r>
-              <a:t>%% Goal: find a good doctor (inspired by DALI slides p.38-40)</a:t>
+              <a:t>%% Goal: find a good doctor</a:t>
             </a:r>
           </a:p>
           <a:p>
@@ -19709,7 +19690,7 @@
               </a:defRPr>
             </a:pPr>
             <a:r>
-              <a:t>%% Goal: keep trying to connect (DALI slide p.17)</a:t>
+              <a:t>%% Goal: keep trying to connect</a:t>
             </a:r>
           </a:p>
           <a:p>
@@ -21439,7 +21420,7 @@
               </a:defRPr>
             </a:pPr>
             <a:r>
-              <a:t>%% DALI equivalent: tenta_residuo(goal)</a:t>
+              <a:t>%% Equivalent predicate: tenta_residuo(goal)</a:t>
             </a:r>
           </a:p>
         </p:txBody>
@@ -21687,7 +21668,7 @@
               </a:defRPr>
             </a:pPr>
             <a:r>
-              <a:t>Control how long past events are kept in memory. Mirrors DALI's directives (slides p.9, p.17): "keep open_accessP until limit_accessA".</a:t>
+              <a:t>Control how long past events are kept in memory. Expired events move to the remember tier.</a:t>
             </a:r>
           </a:p>
         </p:txBody>
@@ -21701,7 +21682,7 @@
         <p:spPr>
           <a:xfrm>
             <a:off x="548640" y="1965960"/>
-            <a:ext cx="10972800" cy="3749039"/>
+            <a:ext cx="10972800" cy="3529584"/>
           </a:xfrm>
           <a:prstGeom prst="rect">
             <a:avLst/>
@@ -21744,7 +21725,7 @@
         <p:spPr>
           <a:xfrm>
             <a:off x="548640" y="1965960"/>
-            <a:ext cx="45720" cy="3749039"/>
+            <a:ext cx="45720" cy="3529584"/>
           </a:xfrm>
           <a:prstGeom prst="rect">
             <a:avLst/>
@@ -21787,7 +21768,7 @@
         <p:spPr>
           <a:xfrm>
             <a:off x="777240" y="2103120"/>
-            <a:ext cx="10561320" cy="3474719"/>
+            <a:ext cx="10561320" cy="3255264"/>
           </a:xfrm>
           <a:prstGeom prst="rect">
             <a:avLst/>
@@ -21841,7 +21822,7 @@
               </a:defRPr>
             </a:pPr>
             <a:r>
-              <a:t>%% DALI slide p.9: past events with terminating conditions</a:t>
+              <a:t>%% Past events with configurable lifetimes</a:t>
             </a:r>
           </a:p>
           <a:p>
@@ -21851,74 +21832,58 @@
               </a:spcAft>
               <a:defRPr sz="1400">
                 <a:solidFill>
+                  <a:srgbClr val="1E293B"/>
+                </a:solidFill>
+                <a:latin typeface="Consolas"/>
+              </a:defRPr>
+            </a:pPr>
+            <a:r>
+              <a:t>past_event(did(open_access), 3600).   %% keep for 1 hour</a:t>
+            </a:r>
+          </a:p>
+          <a:p>
+            <a:pPr>
+              <a:spcAft>
+                <a:spcPts val="100"/>
+              </a:spcAft>
+              <a:defRPr sz="1400">
+                <a:solidFill>
+                  <a:srgbClr val="1E293B"/>
+                </a:solidFill>
+                <a:latin typeface="Consolas"/>
+              </a:defRPr>
+            </a:pPr>
+            <a:r>
+              <a:t>past_event(did(limit_access), 3600).</a:t>
+            </a:r>
+          </a:p>
+          <a:p>
+            <a:pPr>
+              <a:spcAft>
+                <a:spcPts val="100"/>
+              </a:spcAft>
+              <a:defRPr sz="1400">
+                <a:solidFill>
+                  <a:srgbClr val="1E293B"/>
+                </a:solidFill>
+                <a:latin typeface="Consolas"/>
+              </a:defRPr>
+            </a:pPr>
+          </a:p>
+          <a:p>
+            <a:pPr>
+              <a:spcAft>
+                <a:spcPts val="100"/>
+              </a:spcAft>
+              <a:defRPr sz="1400">
+                <a:solidFill>
                   <a:srgbClr val="64748B"/>
                 </a:solidFill>
                 <a:latin typeface="Consolas"/>
               </a:defRPr>
             </a:pPr>
             <a:r>
-              <a:t>%% "keep open_accessP until close_accessA"</a:t>
-            </a:r>
-          </a:p>
-          <a:p>
-            <a:pPr>
-              <a:spcAft>
-                <a:spcPts val="100"/>
-              </a:spcAft>
-              <a:defRPr sz="1400">
-                <a:solidFill>
-                  <a:srgbClr val="1E293B"/>
-                </a:solidFill>
-                <a:latin typeface="Consolas"/>
-              </a:defRPr>
-            </a:pPr>
-            <a:r>
-              <a:t>past_event(did(open_access), 3600).   %% keep for 1 hour</a:t>
-            </a:r>
-          </a:p>
-          <a:p>
-            <a:pPr>
-              <a:spcAft>
-                <a:spcPts val="100"/>
-              </a:spcAft>
-              <a:defRPr sz="1400">
-                <a:solidFill>
-                  <a:srgbClr val="1E293B"/>
-                </a:solidFill>
-                <a:latin typeface="Consolas"/>
-              </a:defRPr>
-            </a:pPr>
-            <a:r>
-              <a:t>past_event(did(limit_access), 3600).</a:t>
-            </a:r>
-          </a:p>
-          <a:p>
-            <a:pPr>
-              <a:spcAft>
-                <a:spcPts val="100"/>
-              </a:spcAft>
-              <a:defRPr sz="1400">
-                <a:solidFill>
-                  <a:srgbClr val="1E293B"/>
-                </a:solidFill>
-                <a:latin typeface="Consolas"/>
-              </a:defRPr>
-            </a:pPr>
-          </a:p>
-          <a:p>
-            <a:pPr>
-              <a:spcAft>
-                <a:spcPts val="100"/>
-              </a:spcAft>
-              <a:defRPr sz="1400">
-                <a:solidFill>
-                  <a:srgbClr val="64748B"/>
-                </a:solidFill>
-                <a:latin typeface="Consolas"/>
-              </a:defRPr>
-            </a:pPr>
-            <a:r>
-              <a:t>%% DALI slide p.17: keep bornP(daniele,...) forever</a:t>
+              <a:t>%% Keep birth records forever</a:t>
             </a:r>
           </a:p>
           <a:p>
@@ -22847,7 +22812,7 @@
               </a:defRPr>
             </a:pPr>
             <a:r>
-              <a:t>Fire when past event patterns match, then CONSUME (delete) them. Enables one-shot reactions to event combinations.</a:t>
+              <a:t>Fire when past event patterns match, then CONSUME (delete) them.</a:t>
             </a:r>
           </a:p>
         </p:txBody>
@@ -22861,7 +22826,7 @@
         <p:spPr>
           <a:xfrm>
             <a:off x="548640" y="1965960"/>
-            <a:ext cx="10972800" cy="3749039"/>
+            <a:ext cx="10972800" cy="3529584"/>
           </a:xfrm>
           <a:prstGeom prst="rect">
             <a:avLst/>
@@ -22904,7 +22869,7 @@
         <p:spPr>
           <a:xfrm>
             <a:off x="548640" y="1965960"/>
-            <a:ext cx="45720" cy="3749039"/>
+            <a:ext cx="45720" cy="3529584"/>
           </a:xfrm>
           <a:prstGeom prst="rect">
             <a:avLst/>
@@ -22947,7 +22912,7 @@
         <p:spPr>
           <a:xfrm>
             <a:off x="777240" y="2103120"/>
-            <a:ext cx="10561320" cy="3474719"/>
+            <a:ext cx="10561320" cy="3255264"/>
           </a:xfrm>
           <a:prstGeom prst="rect">
             <a:avLst/>
@@ -23002,22 +22967,6 @@
             </a:pPr>
             <a:r>
               <a:t>%% When both heat and smoke detected, consume and respond</a:t>
-            </a:r>
-          </a:p>
-          <a:p>
-            <a:pPr>
-              <a:spcAft>
-                <a:spcPts val="100"/>
-              </a:spcAft>
-              <a:defRPr sz="1400">
-                <a:solidFill>
-                  <a:srgbClr val="64748B"/>
-                </a:solidFill>
-                <a:latin typeface="Consolas"/>
-              </a:defRPr>
-            </a:pPr>
-            <a:r>
-              <a:t>%% (inspired by DALI Double Events fire detection example)</a:t>
             </a:r>
           </a:p>
           <a:p>
@@ -23432,7 +23381,7 @@
               </a:defRPr>
             </a:pPr>
             <a:r>
-              <a:t>Conditional export past based on whether an action was or was not done. (DALI slide p.9: access controller pattern)</a:t>
+              <a:t>Conditional export past based on whether an action was or was not done.</a:t>
             </a:r>
           </a:p>
         </p:txBody>
@@ -24248,7 +24197,7 @@
               </a:defRPr>
             </a:pPr>
             <a:r>
-              <a:t>Filter incoming/outgoing messages with real conditions. (DALI slides p.32–33, p.39–41: trust-based filtering)</a:t>
+              <a:t>Filter incoming/outgoing messages with real conditions (trust-based filtering).</a:t>
             </a:r>
           </a:p>
         </p:txBody>
@@ -24402,7 +24351,7 @@
               </a:defRPr>
             </a:pPr>
             <a:r>
-              <a:t>%% TOLD — receive filter (DALI slides p.33, p.39)</a:t>
+              <a:t>%% TOLD — receive filter</a:t>
             </a:r>
           </a:p>
           <a:p>
@@ -24543,7 +24492,7 @@
               </a:defRPr>
             </a:pPr>
             <a:r>
-              <a:t>%% TELL — send filter (DALI slide p.37)</a:t>
+              <a:t>%% TELL — send filter</a:t>
             </a:r>
           </a:p>
           <a:p>
@@ -26275,7 +26224,7 @@
               </a:defRPr>
             </a:pPr>
             <a:r>
-              <a:t>FIPA primitives for influencing "mental state" of other agents. (DALI slides p.30: propose, accept_proposal, send_message)</a:t>
+              <a:t>FIPA primitives for influencing "mental state" of other agents.</a:t>
             </a:r>
           </a:p>
         </p:txBody>
@@ -26429,7 +26378,7 @@
               </a:defRPr>
             </a:pPr>
             <a:r>
-              <a:t>%% Ask a friend about a doctor (DALI slides p.38-39)</a:t>
+              <a:t>%% Ask a friend about a doctor</a:t>
             </a:r>
           </a:p>
           <a:p>
@@ -27365,7 +27314,7 @@
               </a:defRPr>
             </a:pPr>
             <a:r>
-              <a:t>Negotiation via FIPA propose/accept/reject. (DALI slides p.30: propose(Action,[cond1,...,condn], A2))</a:t>
+              <a:t>Negotiation via FIPA propose/accept/reject.</a:t>
             </a:r>
           </a:p>
         </p:txBody>
@@ -27519,7 +27468,7 @@
               </a:defRPr>
             </a:pPr>
             <a:r>
-              <a:t>%% Handle incoming proposals (inspired by DALI slide p.30)</a:t>
+              <a:t>%% Handle incoming proposals</a:t>
             </a:r>
           </a:p>
           <a:p>
@@ -28210,7 +28159,7 @@
               </a:defRPr>
             </a:pPr>
             <a:r>
-              <a:t>Meta-reasoning on messages exploiting ontologies. (DALI slides p.34–35: "piove" ↔ "it_rains", symmetric relations like loves(a,b) ↔ loves(b,a))</a:t>
+              <a:t>Meta-reasoning on messages exploiting ontologies. Define semantic equivalences for event matching and belief checking.</a:t>
             </a:r>
           </a:p>
         </p:txBody>
@@ -28364,7 +28313,7 @@
               </a:defRPr>
             </a:pPr>
             <a:r>
-              <a:t>%% DALI slide p.35: ontology for understanding messages</a:t>
+              <a:t>%% Ontology for understanding messages</a:t>
             </a:r>
           </a:p>
           <a:p>
@@ -28457,7 +28406,7 @@
               </a:defRPr>
             </a:pPr>
             <a:r>
-              <a:t>%% Symmetric relations (DALI slide p.35)</a:t>
+              <a:t>%% Symmetric relations</a:t>
             </a:r>
           </a:p>
           <a:p>
@@ -28595,7 +28544,7 @@
               </a:defRPr>
             </a:pPr>
             <a:r>
-              <a:t>%% on message contents (DALI slide p.34)</a:t>
+              <a:t>%% on message contents using ontology equivalences</a:t>
             </a:r>
           </a:p>
         </p:txBody>
@@ -28843,7 +28792,7 @@
               </a:defRPr>
             </a:pPr>
             <a:r>
-              <a:t>Agents learn from experience. Inspired by DALI slides p.40: patient learns which doctors are effective. [NEW in DALI2]</a:t>
+              <a:t>Agents learn from experience. Triggered when matching events occur. [NEW in DALI2]</a:t>
             </a:r>
           </a:p>
         </p:txBody>
@@ -28857,7 +28806,7 @@
         <p:spPr>
           <a:xfrm>
             <a:off x="548640" y="1965960"/>
-            <a:ext cx="10972800" cy="4407408"/>
+            <a:ext cx="10972800" cy="4187952"/>
           </a:xfrm>
           <a:prstGeom prst="rect">
             <a:avLst/>
@@ -28900,7 +28849,7 @@
         <p:spPr>
           <a:xfrm>
             <a:off x="548640" y="1965960"/>
-            <a:ext cx="45720" cy="4407408"/>
+            <a:ext cx="45720" cy="4187952"/>
           </a:xfrm>
           <a:prstGeom prst="rect">
             <a:avLst/>
@@ -28943,7 +28892,7 @@
         <p:spPr>
           <a:xfrm>
             <a:off x="777240" y="2103120"/>
-            <a:ext cx="10561320" cy="4133088"/>
+            <a:ext cx="10561320" cy="3913632"/>
           </a:xfrm>
           <a:prstGeom prst="rect">
             <a:avLst/>
@@ -28998,22 +28947,6 @@
             </a:pPr>
             <a:r>
               <a:t>%% Learn doctor effectiveness from treatment outcomes</a:t>
-            </a:r>
-          </a:p>
-          <a:p>
-            <a:pPr>
-              <a:spcAft>
-                <a:spcPts val="100"/>
-              </a:spcAft>
-              <a:defRPr sz="1300">
-                <a:solidFill>
-                  <a:srgbClr val="64748B"/>
-                </a:solidFill>
-                <a:latin typeface="Consolas"/>
-              </a:defRPr>
-            </a:pPr>
-            <a:r>
-              <a:t>%% (inspired by DALI slides p.40: recovered_by / not_recovered_by)</a:t>
             </a:r>
           </a:p>
           <a:p>
@@ -29479,7 +29412,7 @@
               </a:defRPr>
             </a:pPr>
             <a:r>
-              <a:t>Utility predicates callable from rule bodies. In original DALI, plain clauses served this role (e.g. access_is_limited :- limit_accessP). [NEW in DALI2]</a:t>
+              <a:t>Utility predicates callable from rule bodies. [NEW in DALI2]</a:t>
             </a:r>
           </a:p>
         </p:txBody>
@@ -29633,7 +29566,7 @@
               </a:defRPr>
             </a:pPr>
             <a:r>
-              <a:t>%% DALI slide p.9: helper conditions for access state</a:t>
+              <a:t>%% Helper conditions for access state</a:t>
             </a:r>
           </a:p>
           <a:p>
@@ -29784,7 +29717,7 @@
               </a:defRPr>
             </a:pPr>
             <a:r>
-              <a:t>%% DALI slide p.11: helper to check if cake is ready</a:t>
+              <a:t>%% Helper to check if cake is ready</a:t>
             </a:r>
           </a:p>
           <a:p>
@@ -38539,7 +38472,7 @@
               </a:defRPr>
             </a:pPr>
             <a:r>
-              <a:t>Features available in DALI2 that have no DALI equivalent:</a:t>
+              <a:t>New features in DALI2:</a:t>
             </a:r>
           </a:p>
         </p:txBody>
